--- a/OPT_DETECTIVI/ro/fisiere/LP02.pptx
+++ b/OPT_DETECTIVI/ro/fisiere/LP02.pptx
@@ -516,10 +516,8 @@
           <a:lstStyle/>
           <a:p>
             <a:r>
-              <a:rPr lang="en-US" dirty="0"/>
-              <a:t>Lucrarea de azi continuă cursul: aceeași întrebare, pusă de data aceasta de voi. Dintre colegii care s-au îmbolnăvit, câți ajung în cifra oficială și unde se pierd ceilalți?</a:t>
-            </a:r>
-            <a:endParaRPr lang="en-US" dirty="0"/>
+              <a:t>Lucrarea de azi continuă cursul „Cine ajunge în cifră”: aceeași întrebare, pusă de data aceasta de voi. Dintre colegii care s-au îmbolnăvit, câți ajung în cifra oficială și unde se pierd ceilalți? Cazul este construit pentru exercițiu: căminul, oamenii, boala și cifrele sunt inventate, ca să puteți vedea toate treptele piramidei, inclusiv pe cele pe care un focar real le ascunde.</a:t>
+            </a:r>
           </a:p>
         </p:txBody>
       </p:sp>
@@ -604,10 +602,8 @@
           <a:lstStyle/>
           <a:p>
             <a:r>
-              <a:rPr lang="en-US" dirty="0"/>
-              <a:t>Varianta (b) are toate cele patru elemente. După regula ei, 32 dintre cei 54 de respondenți sunt cazuri, adică cam șase din zece.</a:t>
-            </a:r>
-            <a:endParaRPr lang="en-US" dirty="0"/>
+              <a:t>Rezolvarea pasului întâi este pe ecran. Regula care poate fi aplicată este varianta (b): conține semnele, locul, timpul și persoana și lasă deoparte alimentul bănuit. Ancheta numără bolnavii după o regulă scrisă, definiția de caz, nu după rezultatele de laborator. O regulă care cere confirmarea de laborator ar număra numai vârful piramidei: în cifra oficială a acestui focar au intrat numai cele 2 cazuri confirmate în laborator și declarate. După regula (b), în număr intră 32 de respondenți din 54, adică 6 din 10. Certitudinea diferă de la un bolnav la altul: cei cu probă pozitivă sunt cazuri confirmate, ceilalți, cazuri probabile, fără confirmare de laborator. Rata de atac are și ea o limită: numitorul ei sunt respondenții, nu toți participanții la petrecere.</a:t>
+            </a:r>
           </a:p>
         </p:txBody>
       </p:sp>
@@ -692,10 +688,8 @@
           <a:lstStyle/>
           <a:p>
             <a:r>
-              <a:rPr lang="en-US" dirty="0"/>
-              <a:t>Dintre cei 32 de bolnavi, cei mai mulți nu au vorbit cu niciun medic. Celelalte pierderi sunt mici. Primele patru sunt subdiagnosticare, ultima este subraportare.</a:t>
-            </a:r>
-            <a:endParaRPr lang="en-US" dirty="0"/>
+              <a:t>Pe ecran este rezolvarea pasului al doilea. Aproape toți bolnavii s-au pierdut la baza piramidei: cea mai mare pierdere sunt cei care nu au vorbit cu niciun medic. Într-un focar cu boală ușoară, cei mai mulți bolnavi se pierd înainte să vadă vreun medic, iar aceasta nu este vina cuiva. Treptele de deasupra pierd puțin: 5 bolnavi au fost la medic fără să li se ceară proba, unul nu a mai adus-o, la unul proba a ieșit negativă, iar un bolnav cu rezultat pozitiv nu a ajuns la autoritate. Primele patru trepte sunt pierderi prin subdiagnosticare: bolnavul nu a fost diagnosticat. Ultima este o pierdere prin subraportare: diagnosticat, dar nedeclarat. În cifra oficială au rămas 2 din cei 32 de bolnavi.</a:t>
+            </a:r>
           </a:p>
         </p:txBody>
       </p:sp>
@@ -780,10 +774,8 @@
           <a:lstStyle/>
           <a:p>
             <a:r>
-              <a:rPr lang="en-US" dirty="0"/>
-              <a:t>Titlul împarte un internat la două cazuri declarate. Ancheta a găsit 32 de bolnavi, iar internat a fost tot unul singur, adică 3%. Numărătorul este același; numitorul era prea mic.</a:t>
-            </a:r>
-            <a:endParaRPr lang="en-US" dirty="0"/>
+              <a:t>Același bolnav internat, împărțit la doi numitori diferiți. Titlul îl împarte la cele 2 cazuri declarate și obține jumătate. Ancheta îl împarte la toți cei 32 de bolnavi găsiți și obține 3%. Se schimbă numai numitorul, iar cel din titlu cuprindea doar vârful piramidei. Cazurile din vârf sunt mai ales cele grave, iar o proporție a internărilor sau a deceselor calculată numai pe ele face boala să pară mai gravă decât este. Este mecanismul din cursul „Cine ajunge în cifră”, la sindromul respirator din Orientul Mijlociu (MERS): când supravegherea ratează cazurile ușoare, cei rămași în vârf sunt mai ales bolnavi gravi, așa că proporția obținută numai din cazurile raportate iese, probabil, prea mare.</a:t>
+            </a:r>
           </a:p>
         </p:txBody>
       </p:sp>
@@ -868,10 +860,8 @@
           <a:lstStyle/>
           <a:p>
             <a:r>
-              <a:rPr lang="en-US" dirty="0"/>
-              <a:t>Piramida focarului din cămin: din 32 de bolnavi, 2 ajung în cifra oficială. În spatele fiecărui caz declarat stau 16 bolnavi, dar numărul nu se mută automat la alt focar.</a:t>
-            </a:r>
-            <a:endParaRPr lang="en-US" dirty="0"/>
+              <a:t>Aceasta este piramida focarului din cămin, citită de jos în sus: 32 de bolnavi; 10 au vorbit cu un medic; 5 au primit cererea unei probe de scaun; 4 au adus-o; la 3 laboratorul a găsit microbul; 2 au fost declarați autorității. În cifra oficială au intrat 2 din 32. În acest focar, fiecărui caz declarat îi corespund 16 bolnavi. Numărul nu se mută automat la alt focar: câți bolnavi stau în spatele unui caz declarat se află numai printr-o anchetă. Cifra oficială a acestui focar este corectă pentru ce a putut vedea sistemul; ancheta a arătat cât de mult a rămas sub ea.</a:t>
+            </a:r>
           </a:p>
         </p:txBody>
       </p:sp>
@@ -956,10 +946,8 @@
           <a:lstStyle/>
           <a:p>
             <a:r>
-              <a:rPr lang="en-US" dirty="0"/>
-              <a:t>Patru lucruri pe care le puteți face diferit de luni dimineață, ca studenți și ca viitori medici.</a:t>
-            </a:r>
-            <a:endParaRPr lang="en-US" dirty="0"/>
+              <a:t>Patru lucruri pe care le puteți face diferit de luni dimineață. Ca studenți: când vă îmbolnăviți după o masă comună, spuneți-i medicului că mai sunt și alți colegi bolnavi. Este singura informație prin care un focar din cămin poate urca din baza piramidei până în cifra oficială. Ca viitori medici: o probă se cere sau nu după criterii clinice, dar o boală cu declarare obligatorie, odată diagnosticată, se declară. Când citiți o proporție a internărilor sau a deceselor, întrebați întâi cine a fost numărat la numitor. Iar când veți completa un certificat de deces, scrieți lanțul întreg, cu boala de la care a pornit totul pe ultimul rând folosit.</a:t>
+            </a:r>
           </a:p>
         </p:txBody>
       </p:sp>
@@ -1044,10 +1032,8 @@
           <a:lstStyle/>
           <a:p>
             <a:r>
-              <a:rPr lang="en-US" dirty="0"/>
-              <a:t>A doua oră o lucrați singuri, acasă, într-un formular individual scurt, cu contul UMF. Termenul este ședința următoare, iar formularul nu intră în notă.</a:t>
-            </a:r>
-            <a:endParaRPr lang="en-US" dirty="0"/>
+              <a:t>A doua oră o lucrați singuri, după ședință, într-un formular individual scurt, completat cu contul UMF până la ședința următoare. Linkul e și în chat; îl primiți și pe e-mailul instituțional. Formularul are trei părți: pasul al patrulea al anchetei din cămin, adică ce puteți spune despre următorul focar și ce l-ar face vizibil mai devreme, apoi două întrebări despre cum se numără decesele: lanțul de pe certificatul de deces și mortalitatea în exces. Pentru ele, recitiți din cursul „Cine ajunge în cifră” ce scrie pe certificatul de deces, cauza de bază a decesului și mortalitatea în exces. Formularul nu intră în notă; după trimitere, vă arată răspunsurile corecte și explicațiile.</a:t>
+            </a:r>
           </a:p>
         </p:txBody>
       </p:sp>
@@ -1132,10 +1118,8 @@
           <a:lstStyle/>
           <a:p>
             <a:r>
-              <a:rPr lang="en-US" dirty="0"/>
-              <a:t>Trei întrebări anonime, pe telefon. Luni veți vedea pe pagina cursului ce am schimbat după răspunsurile voastre.</a:t>
-            </a:r>
-            <a:endParaRPr lang="en-US" dirty="0"/>
+              <a:t>În ultimele minute, biletul de ieșire: trei întrebări anonime pe Mentimeter. Intrați pe menti.com cu codul de pe ecran sau din linkul din chat și răspundeți în câte o propoziție: ce a fost util, unde v-am pierdut și ce ați putea folosi mâine. Răspunsurile arată ce trebuie reluat; luni veți vedea pe pagina cursului ce am schimbat pe baza lor.</a:t>
+            </a:r>
           </a:p>
         </p:txBody>
       </p:sp>
@@ -1220,10 +1204,8 @@
           <a:lstStyle/>
           <a:p>
             <a:r>
-              <a:rPr lang="en-US" dirty="0"/>
-              <a:t>Sâmbătă seara, o colegă își serbează ziua în bucătăria comună a etajului trei. Duminică dimineață, grupul căminului se umple de mesaje. Miercuri, autoritatea primește două fișe de declarare cu aceeași adresă și cere o anchetă.</a:t>
-            </a:r>
-            <a:endParaRPr lang="en-US" dirty="0"/>
+              <a:t>Sâmbătă seara, o colegă își serbează ziua în bucătăria comună a etajului trei. Vin colegi din tot căminul, 60 de persoane, fiecare aduce ceva de mâncare, iar petrecerea ține până după miezul nopții. Duminică dimineața, grupul căminului se umple de mesaje: cineva a stat toată noaptea în baie, altcineva a vomitat de două ori, pe altcineva îl doare doar stomacul. Cei mai mulți rămân în pat și beau apă; câțiva sună la medicul de familie. Luni, un coleg ajunge la camera de gardă, deshidratat. Miercuri, autoritatea de sănătate publică a județului primește două fișe de declarare pentru aceeași boală diareică, de la doi medici diferiți, cu aceeași adresă: căminul. Urmează o anchetă, iar echipa de anchetă sunteți voi.</a:t>
+            </a:r>
           </a:p>
         </p:txBody>
       </p:sp>
@@ -1308,10 +1290,8 @@
           <a:lstStyle/>
           <a:p>
             <a:r>
-              <a:rPr lang="en-US" dirty="0"/>
-              <a:t>Înainte de orice calcul, un vot anonim: dacă v-ați fi îmbolnăvit la această petrecere, ați fi ajuns în cifra oficială a bolii? La finalul lucrării ne întoarcem la el.</a:t>
-            </a:r>
-            <a:endParaRPr lang="en-US" dirty="0"/>
+              <a:t>Înainte de orice calcul, un vot anonim pe Mentimeter; linkul e și în chat. Dacă v-ați fi îmbolnăvit la această petrecere, ați fi ajuns în cifra oficială a bolii? Alegeți una dintre cele patru variante, de la „sigur da” la „sigur nu”. Votați după ce credeți acum, fără niciun calcul. Ne întoarcem la acest vot la sfârșitul lucrării.</a:t>
+            </a:r>
           </a:p>
         </p:txBody>
       </p:sp>
@@ -1396,10 +1376,8 @@
           <a:lstStyle/>
           <a:p>
             <a:r>
-              <a:rPr lang="en-US" dirty="0"/>
-              <a:t>Vă grupați câte trei sau patru vecini de bancă. Un singur formular pe grup, de pe un singur telefon. Fiecare pas se deschide numai după ce grupul alege varianta potrivită la întrebarea cu variante.</a:t>
-            </a:r>
-            <a:endParaRPr lang="en-US" dirty="0"/>
+              <a:t>Ancheta o faceți într-un formular Microsoft Forms: scanați codul QR de pe ecran sau deschideți linkul din chat. Fiecare completează formularul pe cont propriu, de pe telefon sau de pe calculator, și scrie la început grupa și inițialele. Formularul are trei pași. Fiecare pas se deschide numai după ce alegeți varianta potrivită la întrebarea cu variante; după o alegere greșită primiți un indiciu și reveniți la întrebare. Valorile pe care le calculați nu opresc trecerea mai departe: le vedeți corectate, cu explicația, după trimiterea formularului. Calculele sunt adunări, scăderi și împărțiri simple, pe care le puteți face cu aplicația de calcul a telefonului sau a calculatorului. Ce nu este clar scrieți în chat.</a:t>
+            </a:r>
           </a:p>
         </p:txBody>
       </p:sp>
@@ -1484,10 +1462,8 @@
           <a:lstStyle/>
           <a:p>
             <a:r>
-              <a:rPr lang="en-US" dirty="0"/>
-              <a:t>Înainte de a număra bolnavii, scrieți regula după care îi numărați. O definiție de caz are patru elemente: semnele, locul, timpul și persoana. Nu conține alimentul pe care îl bănuiți.</a:t>
-            </a:r>
-            <a:endParaRPr lang="en-US" dirty="0"/>
+              <a:t>Pasul întâi: cine este caz. La petrecere au fost 60 de persoane, iar chestionarul online al anchetei a primit 54 de răspunsuri. Fiecare respondent a spus dacă a avut simptome, care au fost și când au început; tabelul îi grupează în patru rânduri. Înainte de a număra bolnavii, scrieți regula după care îi numărați. O definiție de caz are patru elemente: semnele bolii, locul, timpul și persoana. Nu conține alimentul pe care îl bănuiți, ca în regula desertului din al doilea curs. Iar regula trebuie să poată fi aplicată cu datele pe care le aveți. Alegeți definiția în formular, apoi numărați respondenții care intră în ea și calculați rata de atac: din câți au răspuns, câți s-au îmbolnăvit.</a:t>
+            </a:r>
           </a:p>
         </p:txBody>
       </p:sp>
@@ -1572,10 +1548,8 @@
           <a:lstStyle/>
           <a:p>
             <a:r>
-              <a:rPr lang="en-US" dirty="0"/>
-              <a:t>Piramida supravegherii are cinci trepte: îmbolnăvirea, mersul la medic, proba, rezultatul pozitiv și raportarea. Acum le numărați pe un focar întreg.</a:t>
-            </a:r>
-            <a:endParaRPr lang="en-US" dirty="0"/>
+              <a:t>Pasul al doilea este pasul central al lucrării: de la bolnav la fișa de declarare. Piramida supravegherii are, în cursul „Cine ajunge în cifră”, cinci trepte: îmbolnăvirea, mersul la medic, proba de scaun, cerută și adusă, rezultatul pozitiv și raportarea. Pe ecran sunt cazurile din pasul întâi, urmărite treaptă cu treaptă până la cifra oficială. Pierderile au două nume. Subdiagnosticarea înseamnă că bolnavul nu a fost diagnosticat: nu a mers la medic, nu a dat o probă sau laboratorul nu a găsit microbul. Subraportarea înseamnă că diagnosticul a fost pus, dar nu a ajuns la autoritate. Acum le numărați pe un focar întreg: câți ajung în cifra oficială, la ce treaptă se pierd cei mai mulți, câți prin fiecare dintre cele două pierderi și câți bolnavi stau în spatele fiecărui caz declarat.</a:t>
+            </a:r>
           </a:p>
         </p:txBody>
       </p:sp>
@@ -1660,10 +1634,8 @@
           <a:lstStyle/>
           <a:p>
             <a:r>
-              <a:rPr lang="en-US" dirty="0"/>
-              <a:t>Un singur bolnav a fost internat, colegul ajuns la camera de gardă. O pagină de știri locale preia datele oficiale și titrează. Ați crede acest titlu?</a:t>
-            </a:r>
-            <a:endParaRPr lang="en-US" dirty="0"/>
+              <a:t>Pasul al treilea: cât de gravă pare boala. Cursul a arătat că, atunci când lipsesc cazurile ușoare, o boală poate părea mai gravă decât este. Același lucru se poate întâmpla într-un cămin. Un singur bolnav a fost internat: colegul ajuns la camera de gardă, care a primit perfuzii și a rămas o noapte în spital. El este unul dintre cei 2 bolnavi declarați; celălalt a fost văzut de medicul de familie. O pagină de știri locale preia datele oficiale și titrează că jumătate dintre bolnavi au ajuns la spital. Și titlul este construit pentru exercițiu. Ați crede acest titlu? Alegeți în formular, apoi calculați ce proporție dintre toți bolnavii găsiți de anchetă au fost internați.</a:t>
+            </a:r>
           </a:p>
         </p:txBody>
       </p:sp>
@@ -1748,10 +1720,8 @@
           <a:lstStyle/>
           <a:p>
             <a:r>
-              <a:rPr lang="en-US" dirty="0"/>
-              <a:t>După fiecare pas, ne uităm împreună la distribuția răspunsurilor grupurilor: unde s-a greșit cel mai des și de ce.</a:t>
-            </a:r>
-            <a:endParaRPr lang="en-US" dirty="0"/>
+              <a:t>După fiecare pas ne uităm împreună la distribuția răspunsurilor voastre din formular. Nu căutăm cine a greșit, ci unde s-a greșit cel mai des și de ce: o greșeală frecventă arată de obicei o idee care trebuie reluată. Dacă vreți să spuneți cum ați judecat, scrieți în chat sau folosiți reacția „mână ridicată” din Teams.</a:t>
+            </a:r>
           </a:p>
         </p:txBody>
       </p:sp>
@@ -1836,10 +1806,8 @@
           <a:lstStyle/>
           <a:p>
             <a:r>
-              <a:rPr lang="en-US" dirty="0"/>
-              <a:t>Răspunsul care se potrivește cu acest focar este „probabil nu”. Un bolnav din cămin avea cam o șansă din șaisprezece să ajungă în cifra oficială.</a:t>
-            </a:r>
-            <a:endParaRPr lang="en-US" dirty="0"/>
+              <a:t>Ne întoarcem la votul de deschidere. Cifra de pe ecran este cea a acestui focar: în cifra oficială au intrat 2 bolnavi din 32, adică o șansă din 16 pentru fiecare bolnav din cămin. Într-un focar cu boală ușoară, cei mai mulți bolnavi se pierd la baza piramidei, înainte să vadă vreun medic. Nimeni nu a greșit: piramida filtrează firesc. Un bolnav lipsește din cifra oficială fie pentru că nu a fost diagnosticat, fie pentru că, deși diagnosticat, nu a fost raportat. Prima pierdere are, de cele mai multe ori, o explicație clinică: cine are o boală ușoară nu merge la medic, iar o probă se cere după criterii clinice. A doua pierdere, fișa nedeclarată, nu are una.</a:t>
+            </a:r>
           </a:p>
         </p:txBody>
       </p:sp>
@@ -7151,7 +7119,7 @@
                 <a:ea typeface="Palatino Linotype" pitchFamily="34" charset="-122"/>
                 <a:cs typeface="Palatino Linotype" pitchFamily="34" charset="-120"/>
               </a:rPr>
-              <a:t>Linkul îl primiți și pe e-mailul instituțional și pe Teams</a:t>
+              <a:t>Linkul e și în chat; îl primiți și pe e-mailul instituțional</a:t>
             </a:r>
             <a:endParaRPr lang="en-US" sz="1700" dirty="0"/>
           </a:p>
@@ -7875,7 +7843,7 @@
                 <a:ea typeface="Palatino Linotype" pitchFamily="34" charset="-122"/>
                 <a:cs typeface="Palatino Linotype" pitchFamily="34" charset="-120"/>
               </a:rPr>
-              <a:t>Mentimeter: intrați pe menti.com cu codul afișat pe ecran.</a:t>
+              <a:t>Mentimeter: menti.com, cu codul de pe ecran; linkul e și în chat.</a:t>
             </a:r>
             <a:endParaRPr lang="en-US" sz="1500" dirty="0"/>
           </a:p>
@@ -8837,7 +8805,7 @@
                 <a:ea typeface="Palatino Linotype" pitchFamily="34" charset="-122"/>
                 <a:cs typeface="Palatino Linotype" pitchFamily="34" charset="-120"/>
               </a:rPr>
-              <a:t>VOT ANONIM · TELEFON</a:t>
+              <a:t>VOT ANONIM · MENTIMETER</a:t>
             </a:r>
             <a:endParaRPr lang="en-US" sz="1300" dirty="0"/>
           </a:p>
@@ -9595,7 +9563,7 @@
                 <a:ea typeface="Palatino Linotype" pitchFamily="34" charset="-122"/>
                 <a:cs typeface="Palatino Linotype" pitchFamily="34" charset="-120"/>
               </a:rPr>
-              <a:t>FORMULAR · GRUPURI</a:t>
+              <a:t>FORMULAR · FIECARE</a:t>
             </a:r>
             <a:endParaRPr lang="en-US" sz="1300" dirty="0"/>
           </a:p>
@@ -9806,7 +9774,7 @@
                 <a:ea typeface="Palatino Linotype" pitchFamily="34" charset="-122"/>
                 <a:cs typeface="Palatino Linotype" pitchFamily="34" charset="-120"/>
               </a:rPr>
-              <a:t>Grupuri de 3–4 vecini de bancă, un singur telefon pe grup</a:t>
+              <a:t>Fiecare completează formularul, de pe telefon sau calculator</a:t>
             </a:r>
             <a:endParaRPr lang="en-US" sz="1700" dirty="0"/>
           </a:p>
@@ -9939,7 +9907,7 @@
                 <a:ea typeface="Palatino Linotype" pitchFamily="34" charset="-122"/>
                 <a:cs typeface="Palatino Linotype" pitchFamily="34" charset="-120"/>
               </a:rPr>
-              <a:t>Scrieți grupa și inițialele membrilor grupului</a:t>
+              <a:t>Scrieți grupa și inițialele voastre</a:t>
             </a:r>
             <a:endParaRPr lang="en-US" sz="1700" dirty="0"/>
           </a:p>
@@ -10314,7 +10282,7 @@
                 <a:ea typeface="Palatino Linotype" pitchFamily="34" charset="-122"/>
                 <a:cs typeface="Palatino Linotype" pitchFamily="34" charset="-120"/>
               </a:rPr>
-              <a:t>Scanați cu camera telefonului</a:t>
+              <a:t>Codul QR sau linkul din chat</a:t>
             </a:r>
             <a:endParaRPr lang="en-US" sz="1400" dirty="0"/>
           </a:p>
@@ -12725,7 +12693,7 @@
                 <a:ea typeface="Palatino Linotype" pitchFamily="34" charset="-122"/>
                 <a:cs typeface="Palatino Linotype" pitchFamily="34" charset="-120"/>
               </a:rPr>
-              <a:t>REZULTATELE SĂLII</a:t>
+              <a:t>REZULTATELE VOASTRE</a:t>
             </a:r>
             <a:endParaRPr lang="en-US" sz="1300" dirty="0"/>
           </a:p>
@@ -12803,7 +12771,7 @@
                 <a:ea typeface="Palatino Linotype" pitchFamily="34" charset="-122"/>
                 <a:cs typeface="Palatino Linotype" pitchFamily="34" charset="-120"/>
               </a:rPr>
-              <a:t>Ce au răspuns grupurile</a:t>
+              <a:t>Ce ați răspuns în formular</a:t>
             </a:r>
             <a:endParaRPr lang="en-US" sz="3100" dirty="0"/>
           </a:p>
